--- a/ゲーム科1年/01_後期/ゲームエンジンⅡ/02_クラスの継承.pptx
+++ b/ゲーム科1年/01_後期/ゲームエンジンⅡ/02_クラスの継承.pptx
@@ -288,7 +288,7 @@
           <a:p>
             <a:fld id="{E9CC885B-4903-4D54-9A93-00025F12DED9}" type="datetimeFigureOut">
               <a:rPr kumimoji="1" lang="ja-JP" altLang="en-US" smtClean="0"/>
-              <a:t>2024/11/5</a:t>
+              <a:t>2025/3/5</a:t>
             </a:fld>
             <a:endParaRPr kumimoji="1" lang="ja-JP" altLang="en-US"/>
           </a:p>
@@ -518,7 +518,7 @@
           <a:p>
             <a:fld id="{E9CC885B-4903-4D54-9A93-00025F12DED9}" type="datetimeFigureOut">
               <a:rPr kumimoji="1" lang="ja-JP" altLang="en-US" smtClean="0"/>
-              <a:t>2024/11/5</a:t>
+              <a:t>2025/3/5</a:t>
             </a:fld>
             <a:endParaRPr kumimoji="1" lang="ja-JP" altLang="en-US"/>
           </a:p>
@@ -758,7 +758,7 @@
           <a:p>
             <a:fld id="{E9CC885B-4903-4D54-9A93-00025F12DED9}" type="datetimeFigureOut">
               <a:rPr kumimoji="1" lang="ja-JP" altLang="en-US" smtClean="0"/>
-              <a:t>2024/11/5</a:t>
+              <a:t>2025/3/5</a:t>
             </a:fld>
             <a:endParaRPr kumimoji="1" lang="ja-JP" altLang="en-US"/>
           </a:p>
@@ -988,7 +988,7 @@
           <a:p>
             <a:fld id="{E9CC885B-4903-4D54-9A93-00025F12DED9}" type="datetimeFigureOut">
               <a:rPr kumimoji="1" lang="ja-JP" altLang="en-US" smtClean="0"/>
-              <a:t>2024/11/5</a:t>
+              <a:t>2025/3/5</a:t>
             </a:fld>
             <a:endParaRPr kumimoji="1" lang="ja-JP" altLang="en-US"/>
           </a:p>
@@ -1263,7 +1263,7 @@
           <a:p>
             <a:fld id="{E9CC885B-4903-4D54-9A93-00025F12DED9}" type="datetimeFigureOut">
               <a:rPr kumimoji="1" lang="ja-JP" altLang="en-US" smtClean="0"/>
-              <a:t>2024/11/5</a:t>
+              <a:t>2025/3/5</a:t>
             </a:fld>
             <a:endParaRPr kumimoji="1" lang="ja-JP" altLang="en-US"/>
           </a:p>
@@ -1592,7 +1592,7 @@
           <a:p>
             <a:fld id="{E9CC885B-4903-4D54-9A93-00025F12DED9}" type="datetimeFigureOut">
               <a:rPr kumimoji="1" lang="ja-JP" altLang="en-US" smtClean="0"/>
-              <a:t>2024/11/5</a:t>
+              <a:t>2025/3/5</a:t>
             </a:fld>
             <a:endParaRPr kumimoji="1" lang="ja-JP" altLang="en-US"/>
           </a:p>
@@ -2068,7 +2068,7 @@
           <a:p>
             <a:fld id="{E9CC885B-4903-4D54-9A93-00025F12DED9}" type="datetimeFigureOut">
               <a:rPr kumimoji="1" lang="ja-JP" altLang="en-US" smtClean="0"/>
-              <a:t>2024/11/5</a:t>
+              <a:t>2025/3/5</a:t>
             </a:fld>
             <a:endParaRPr kumimoji="1" lang="ja-JP" altLang="en-US"/>
           </a:p>
@@ -2209,7 +2209,7 @@
           <a:p>
             <a:fld id="{E9CC885B-4903-4D54-9A93-00025F12DED9}" type="datetimeFigureOut">
               <a:rPr kumimoji="1" lang="ja-JP" altLang="en-US" smtClean="0"/>
-              <a:t>2024/11/5</a:t>
+              <a:t>2025/3/5</a:t>
             </a:fld>
             <a:endParaRPr kumimoji="1" lang="ja-JP" altLang="en-US"/>
           </a:p>
@@ -2322,7 +2322,7 @@
           <a:p>
             <a:fld id="{E9CC885B-4903-4D54-9A93-00025F12DED9}" type="datetimeFigureOut">
               <a:rPr kumimoji="1" lang="ja-JP" altLang="en-US" smtClean="0"/>
-              <a:t>2024/11/5</a:t>
+              <a:t>2025/3/5</a:t>
             </a:fld>
             <a:endParaRPr kumimoji="1" lang="ja-JP" altLang="en-US"/>
           </a:p>
@@ -2665,7 +2665,7 @@
           <a:p>
             <a:fld id="{E9CC885B-4903-4D54-9A93-00025F12DED9}" type="datetimeFigureOut">
               <a:rPr kumimoji="1" lang="ja-JP" altLang="en-US" smtClean="0"/>
-              <a:t>2024/11/5</a:t>
+              <a:t>2025/3/5</a:t>
             </a:fld>
             <a:endParaRPr kumimoji="1" lang="ja-JP" altLang="en-US"/>
           </a:p>
@@ -2953,7 +2953,7 @@
           <a:p>
             <a:fld id="{E9CC885B-4903-4D54-9A93-00025F12DED9}" type="datetimeFigureOut">
               <a:rPr kumimoji="1" lang="ja-JP" altLang="en-US" smtClean="0"/>
-              <a:t>2024/11/5</a:t>
+              <a:t>2025/3/5</a:t>
             </a:fld>
             <a:endParaRPr kumimoji="1" lang="ja-JP" altLang="en-US"/>
           </a:p>
@@ -3226,7 +3226,7 @@
           <a:p>
             <a:fld id="{E9CC885B-4903-4D54-9A93-00025F12DED9}" type="datetimeFigureOut">
               <a:rPr kumimoji="1" lang="ja-JP" altLang="en-US" smtClean="0"/>
-              <a:t>2024/11/5</a:t>
+              <a:t>2025/3/5</a:t>
             </a:fld>
             <a:endParaRPr kumimoji="1" lang="ja-JP" altLang="en-US"/>
           </a:p>
@@ -3693,7 +3693,7 @@
         <p:spPr>
           <a:xfrm>
             <a:off x="567542" y="1216429"/>
-            <a:ext cx="11572399" cy="3785652"/>
+            <a:ext cx="10423046" cy="3785652"/>
           </a:xfrm>
           <a:prstGeom prst="rect">
             <a:avLst/>
@@ -3771,7 +3771,7 @@
           <a:p>
             <a:r>
               <a:rPr kumimoji="1" lang="ja-JP" altLang="en-US" sz="2400" dirty="0"/>
-              <a:t>ベースクラスとも呼ばれる、様々な機能の基底、基盤となる機能を持ったクラス。</a:t>
+              <a:t>様々な機能の基底、基盤となる機能を持ったクラス。</a:t>
             </a:r>
             <a:endParaRPr kumimoji="1" lang="en-US" altLang="ja-JP" sz="2400" dirty="0"/>
           </a:p>
